--- a/PPTs/Ch11 Exercises.pptx
+++ b/PPTs/Ch11 Exercises.pptx
@@ -8620,7 +8620,7 @@
           <a:p>
             <a:r>
               <a:rPr lang="en-US" dirty="0"/>
-              <a:t>Fall 2025</a:t>
+              <a:t>Fall 2026</a:t>
             </a:r>
           </a:p>
         </p:txBody>
@@ -8690,7 +8690,7 @@
                 </a:solidFill>
                 <a:latin typeface="Gill Sans MT"/>
               </a:rPr>
-              <a:t>Chapter 11</a:t>
+              <a:t>Chapter 16</a:t>
             </a:r>
             <a:endParaRPr lang="en-US" b="1" dirty="0">
               <a:solidFill>
